--- a/scripts/fixtures/library/sample.pptx
+++ b/scripts/fixtures/library/sample.pptx
@@ -10,7 +10,7 @@
     <p:sldId id="258" r:id="rId9"/>
     <p:sldId id="259" r:id="rId10"/>
   </p:sldIdLst>
-  <p:sldSz cx="12191695" cy="6858000" type="screen4x3"/>
+  <p:sldSz cx="9144000" cy="6858000" type="screen4x3"/>
   <p:notesSz cx="6858000" cy="9144000"/>
   <p:defaultTextStyle>
     <a:defPPr>
@@ -3093,59 +3093,19 @@
       <p:grpSpPr/>
       <p:sp>
         <p:nvSpPr>
-          <p:cNvPr id="2" name="TextBox 1"/>
-          <p:cNvSpPr txBox="1"/>
-          <p:nvPr/>
-        </p:nvSpPr>
-        <p:spPr>
-          <a:xfrm>
-            <a:off x="0" y="0"/>
-            <a:ext cx="12191695" cy="6858000"/>
-          </a:xfrm>
-          <a:prstGeom prst="rect">
-            <a:avLst/>
-          </a:prstGeom>
-          <a:solidFill>
-            <a:srgbClr val="1F3A5F"/>
-          </a:solidFill>
-        </p:spPr>
-        <p:txBody>
-          <a:bodyPr wrap="none">
-            <a:spAutoFit/>
-          </a:bodyPr>
-          <a:lstStyle/>
-          <a:p/>
-        </p:txBody>
-      </p:sp>
-      <p:sp>
-        <p:nvSpPr>
-          <p:cNvPr id="3" name="TextBox 2"/>
-          <p:cNvSpPr txBox="1"/>
-          <p:nvPr/>
-        </p:nvSpPr>
-        <p:spPr>
-          <a:xfrm>
-            <a:off x="822960" y="1828800"/>
-            <a:ext cx="10545775" cy="1097280"/>
-          </a:xfrm>
-          <a:prstGeom prst="rect">
-            <a:avLst/>
-          </a:prstGeom>
-          <a:noFill/>
-        </p:spPr>
-        <p:txBody>
-          <a:bodyPr wrap="none">
-            <a:spAutoFit/>
-          </a:bodyPr>
-          <a:lstStyle/>
-          <a:p>
-            <a:pPr>
-              <a:defRPr sz="4000" b="1">
-                <a:solidFill>
-                  <a:srgbClr val="FFFFFF"/>
-                </a:solidFill>
-              </a:defRPr>
-            </a:pPr>
+          <p:cNvPr id="2" name="Title 1"/>
+          <p:cNvSpPr>
+            <a:spLocks noGrp="1"/>
+          </p:cNvSpPr>
+          <p:nvPr>
+            <p:ph type="ctrTitle"/>
+          </p:nvPr>
+        </p:nvSpPr>
+        <p:spPr/>
+        <p:txBody>
+          <a:bodyPr/>
+          <a:lstStyle/>
+          <a:p>
             <a:r>
               <a:t>Library preview</a:t>
             </a:r>
@@ -3154,70 +3114,21 @@
       </p:sp>
       <p:sp>
         <p:nvSpPr>
-          <p:cNvPr id="4" name="TextBox 3"/>
-          <p:cNvSpPr txBox="1"/>
-          <p:nvPr/>
-        </p:nvSpPr>
-        <p:spPr>
-          <a:xfrm>
-            <a:off x="822960" y="3108960"/>
-            <a:ext cx="10545775" cy="1005840"/>
-          </a:xfrm>
-          <a:prstGeom prst="rect">
-            <a:avLst/>
-          </a:prstGeom>
-          <a:noFill/>
-        </p:spPr>
-        <p:txBody>
-          <a:bodyPr wrap="none">
-            <a:spAutoFit/>
-          </a:bodyPr>
-          <a:lstStyle/>
-          <a:p>
-            <a:pPr>
-              <a:defRPr sz="2000">
-                <a:solidFill>
-                  <a:srgbClr val="E8E8E8"/>
-                </a:solidFill>
-              </a:defRPr>
-            </a:pPr>
+          <p:cNvPr id="3" name="Subtitle 2"/>
+          <p:cNvSpPr>
+            <a:spLocks noGrp="1"/>
+          </p:cNvSpPr>
+          <p:nvPr>
+            <p:ph type="subTitle" idx="1"/>
+          </p:nvPr>
+        </p:nvSpPr>
+        <p:spPr/>
+        <p:txBody>
+          <a:bodyPr/>
+          <a:lstStyle/>
+          <a:p>
             <a:r>
               <a:t>A four-slide fixture for the desktop PPTX viewer.</a:t>
-            </a:r>
-          </a:p>
-        </p:txBody>
-      </p:sp>
-      <p:sp>
-        <p:nvSpPr>
-          <p:cNvPr id="5" name="TextBox 4"/>
-          <p:cNvSpPr txBox="1"/>
-          <p:nvPr/>
-        </p:nvSpPr>
-        <p:spPr>
-          <a:xfrm>
-            <a:off x="10789920" y="6035040"/>
-            <a:ext cx="914400" cy="365760"/>
-          </a:xfrm>
-          <a:prstGeom prst="rect">
-            <a:avLst/>
-          </a:prstGeom>
-          <a:noFill/>
-        </p:spPr>
-        <p:txBody>
-          <a:bodyPr wrap="none">
-            <a:spAutoFit/>
-          </a:bodyPr>
-          <a:lstStyle/>
-          <a:p>
-            <a:pPr>
-              <a:defRPr sz="1200">
-                <a:solidFill>
-                  <a:srgbClr val="CCCCCC"/>
-                </a:solidFill>
-              </a:defRPr>
-            </a:pPr>
-            <a:r>
-              <a:t>1 / 4</a:t>
             </a:r>
           </a:p>
         </p:txBody>
@@ -3242,131 +3153,50 @@
       <p:grpSpPr/>
       <p:sp>
         <p:nvSpPr>
-          <p:cNvPr id="2" name="TextBox 1"/>
-          <p:cNvSpPr txBox="1"/>
-          <p:nvPr/>
-        </p:nvSpPr>
-        <p:spPr>
-          <a:xfrm>
-            <a:off x="0" y="0"/>
-            <a:ext cx="12191695" cy="6858000"/>
-          </a:xfrm>
-          <a:prstGeom prst="rect">
-            <a:avLst/>
-          </a:prstGeom>
-          <a:solidFill>
-            <a:srgbClr val="2F6F4F"/>
-          </a:solidFill>
-        </p:spPr>
-        <p:txBody>
-          <a:bodyPr wrap="none">
-            <a:spAutoFit/>
-          </a:bodyPr>
-          <a:lstStyle/>
-          <a:p/>
-        </p:txBody>
-      </p:sp>
-      <p:sp>
-        <p:nvSpPr>
-          <p:cNvPr id="3" name="TextBox 2"/>
-          <p:cNvSpPr txBox="1"/>
-          <p:nvPr/>
-        </p:nvSpPr>
-        <p:spPr>
-          <a:xfrm>
-            <a:off x="822960" y="1828800"/>
-            <a:ext cx="10545775" cy="1097280"/>
-          </a:xfrm>
-          <a:prstGeom prst="rect">
-            <a:avLst/>
-          </a:prstGeom>
-          <a:noFill/>
-        </p:spPr>
-        <p:txBody>
-          <a:bodyPr wrap="none">
-            <a:spAutoFit/>
-          </a:bodyPr>
-          <a:lstStyle/>
+          <p:cNvPr id="2" name="Title 1"/>
+          <p:cNvSpPr>
+            <a:spLocks noGrp="1"/>
+          </p:cNvSpPr>
+          <p:nvPr>
+            <p:ph type="title"/>
+          </p:nvPr>
+        </p:nvSpPr>
+        <p:spPr/>
+        <p:txBody>
+          <a:bodyPr/>
+          <a:lstStyle/>
+          <a:p>
+            <a:r>
+              <a:t>What the viewer renders</a:t>
+            </a:r>
+          </a:p>
+        </p:txBody>
+      </p:sp>
+      <p:sp>
+        <p:nvSpPr>
+          <p:cNvPr id="3" name="Content Placeholder 2"/>
+          <p:cNvSpPr>
+            <a:spLocks noGrp="1"/>
+          </p:cNvSpPr>
+          <p:nvPr>
+            <p:ph idx="1"/>
+          </p:nvPr>
+        </p:nvSpPr>
+        <p:spPr/>
+        <p:txBody>
+          <a:bodyPr/>
+          <a:lstStyle/>
+          <a:p>
+            <a:r>
+              <a:t>Each slide is drawn onto a canvas.</a:t>
+            </a:r>
+          </a:p>
           <a:p>
             <a:pPr>
-              <a:defRPr sz="4000" b="1">
-                <a:solidFill>
-                  <a:srgbClr val="FFFFFF"/>
-                </a:solidFill>
-              </a:defRPr>
+              <a:defRPr sz="2400"/>
             </a:pPr>
             <a:r>
-              <a:t>What the viewer renders</a:t>
-            </a:r>
-          </a:p>
-        </p:txBody>
-      </p:sp>
-      <p:sp>
-        <p:nvSpPr>
-          <p:cNvPr id="4" name="TextBox 3"/>
-          <p:cNvSpPr txBox="1"/>
-          <p:nvPr/>
-        </p:nvSpPr>
-        <p:spPr>
-          <a:xfrm>
-            <a:off x="822960" y="3108960"/>
-            <a:ext cx="10545775" cy="1005840"/>
-          </a:xfrm>
-          <a:prstGeom prst="rect">
-            <a:avLst/>
-          </a:prstGeom>
-          <a:noFill/>
-        </p:spPr>
-        <p:txBody>
-          <a:bodyPr wrap="none">
-            <a:spAutoFit/>
-          </a:bodyPr>
-          <a:lstStyle/>
-          <a:p>
-            <a:pPr>
-              <a:defRPr sz="2000">
-                <a:solidFill>
-                  <a:srgbClr val="E8E8E8"/>
-                </a:solidFill>
-              </a:defRPr>
-            </a:pPr>
-            <a:r>
-              <a:t>Each slide is drawn onto a canvas; thumbnails come from the same renderer.</a:t>
-            </a:r>
-          </a:p>
-        </p:txBody>
-      </p:sp>
-      <p:sp>
-        <p:nvSpPr>
-          <p:cNvPr id="5" name="TextBox 4"/>
-          <p:cNvSpPr txBox="1"/>
-          <p:nvPr/>
-        </p:nvSpPr>
-        <p:spPr>
-          <a:xfrm>
-            <a:off x="10789920" y="6035040"/>
-            <a:ext cx="914400" cy="365760"/>
-          </a:xfrm>
-          <a:prstGeom prst="rect">
-            <a:avLst/>
-          </a:prstGeom>
-          <a:noFill/>
-        </p:spPr>
-        <p:txBody>
-          <a:bodyPr wrap="none">
-            <a:spAutoFit/>
-          </a:bodyPr>
-          <a:lstStyle/>
-          <a:p>
-            <a:pPr>
-              <a:defRPr sz="1200">
-                <a:solidFill>
-                  <a:srgbClr val="CCCCCC"/>
-                </a:solidFill>
-              </a:defRPr>
-            </a:pPr>
-            <a:r>
-              <a:t>2 / 4</a:t>
+              <a:t>Text runs are visible in the rendered slide.</a:t>
             </a:r>
           </a:p>
         </p:txBody>
@@ -3391,59 +3221,19 @@
       <p:grpSpPr/>
       <p:sp>
         <p:nvSpPr>
-          <p:cNvPr id="2" name="TextBox 1"/>
-          <p:cNvSpPr txBox="1"/>
-          <p:nvPr/>
-        </p:nvSpPr>
-        <p:spPr>
-          <a:xfrm>
-            <a:off x="0" y="0"/>
-            <a:ext cx="12191695" cy="6858000"/>
-          </a:xfrm>
-          <a:prstGeom prst="rect">
-            <a:avLst/>
-          </a:prstGeom>
-          <a:solidFill>
-            <a:srgbClr val="6F3F1F"/>
-          </a:solidFill>
-        </p:spPr>
-        <p:txBody>
-          <a:bodyPr wrap="none">
-            <a:spAutoFit/>
-          </a:bodyPr>
-          <a:lstStyle/>
-          <a:p/>
-        </p:txBody>
-      </p:sp>
-      <p:sp>
-        <p:nvSpPr>
-          <p:cNvPr id="3" name="TextBox 2"/>
-          <p:cNvSpPr txBox="1"/>
-          <p:nvPr/>
-        </p:nvSpPr>
-        <p:spPr>
-          <a:xfrm>
-            <a:off x="822960" y="1828800"/>
-            <a:ext cx="10545775" cy="1097280"/>
-          </a:xfrm>
-          <a:prstGeom prst="rect">
-            <a:avLst/>
-          </a:prstGeom>
-          <a:noFill/>
-        </p:spPr>
-        <p:txBody>
-          <a:bodyPr wrap="none">
-            <a:spAutoFit/>
-          </a:bodyPr>
-          <a:lstStyle/>
-          <a:p>
-            <a:pPr>
-              <a:defRPr sz="4000" b="1">
-                <a:solidFill>
-                  <a:srgbClr val="FFFFFF"/>
-                </a:solidFill>
-              </a:defRPr>
-            </a:pPr>
+          <p:cNvPr id="2" name="Title 1"/>
+          <p:cNvSpPr>
+            <a:spLocks noGrp="1"/>
+          </p:cNvSpPr>
+          <p:nvPr>
+            <p:ph type="title"/>
+          </p:nvPr>
+        </p:nvSpPr>
+        <p:spPr/>
+        <p:txBody>
+          <a:bodyPr/>
+          <a:lstStyle/>
+          <a:p>
             <a:r>
               <a:t>Multi-slide navigation</a:t>
             </a:r>
@@ -3452,70 +3242,21 @@
       </p:sp>
       <p:sp>
         <p:nvSpPr>
-          <p:cNvPr id="4" name="TextBox 3"/>
-          <p:cNvSpPr txBox="1"/>
-          <p:nvPr/>
-        </p:nvSpPr>
-        <p:spPr>
-          <a:xfrm>
-            <a:off x="822960" y="3108960"/>
-            <a:ext cx="10545775" cy="1005840"/>
-          </a:xfrm>
-          <a:prstGeom prst="rect">
-            <a:avLst/>
-          </a:prstGeom>
-          <a:noFill/>
-        </p:spPr>
-        <p:txBody>
-          <a:bodyPr wrap="none">
-            <a:spAutoFit/>
-          </a:bodyPr>
-          <a:lstStyle/>
-          <a:p>
-            <a:pPr>
-              <a:defRPr sz="2000">
-                <a:solidFill>
-                  <a:srgbClr val="E8E8E8"/>
-                </a:solidFill>
-              </a:defRPr>
-            </a:pPr>
+          <p:cNvPr id="3" name="Content Placeholder 2"/>
+          <p:cNvSpPr>
+            <a:spLocks noGrp="1"/>
+          </p:cNvSpPr>
+          <p:nvPr>
+            <p:ph idx="1"/>
+          </p:nvPr>
+        </p:nvSpPr>
+        <p:spPr/>
+        <p:txBody>
+          <a:bodyPr/>
+          <a:lstStyle/>
+          <a:p>
             <a:r>
               <a:t>Previous, next, Home and End move through the deck.</a:t>
-            </a:r>
-          </a:p>
-        </p:txBody>
-      </p:sp>
-      <p:sp>
-        <p:nvSpPr>
-          <p:cNvPr id="5" name="TextBox 4"/>
-          <p:cNvSpPr txBox="1"/>
-          <p:nvPr/>
-        </p:nvSpPr>
-        <p:spPr>
-          <a:xfrm>
-            <a:off x="10789920" y="6035040"/>
-            <a:ext cx="914400" cy="365760"/>
-          </a:xfrm>
-          <a:prstGeom prst="rect">
-            <a:avLst/>
-          </a:prstGeom>
-          <a:noFill/>
-        </p:spPr>
-        <p:txBody>
-          <a:bodyPr wrap="none">
-            <a:spAutoFit/>
-          </a:bodyPr>
-          <a:lstStyle/>
-          <a:p>
-            <a:pPr>
-              <a:defRPr sz="1200">
-                <a:solidFill>
-                  <a:srgbClr val="CCCCCC"/>
-                </a:solidFill>
-              </a:defRPr>
-            </a:pPr>
-            <a:r>
-              <a:t>3 / 4</a:t>
             </a:r>
           </a:p>
         </p:txBody>
@@ -3540,59 +3281,19 @@
       <p:grpSpPr/>
       <p:sp>
         <p:nvSpPr>
-          <p:cNvPr id="2" name="TextBox 1"/>
-          <p:cNvSpPr txBox="1"/>
-          <p:nvPr/>
-        </p:nvSpPr>
-        <p:spPr>
-          <a:xfrm>
-            <a:off x="0" y="0"/>
-            <a:ext cx="12191695" cy="6858000"/>
-          </a:xfrm>
-          <a:prstGeom prst="rect">
-            <a:avLst/>
-          </a:prstGeom>
-          <a:solidFill>
-            <a:srgbClr val="3F1F5F"/>
-          </a:solidFill>
-        </p:spPr>
-        <p:txBody>
-          <a:bodyPr wrap="none">
-            <a:spAutoFit/>
-          </a:bodyPr>
-          <a:lstStyle/>
-          <a:p/>
-        </p:txBody>
-      </p:sp>
-      <p:sp>
-        <p:nvSpPr>
-          <p:cNvPr id="3" name="TextBox 2"/>
-          <p:cNvSpPr txBox="1"/>
-          <p:nvPr/>
-        </p:nvSpPr>
-        <p:spPr>
-          <a:xfrm>
-            <a:off x="822960" y="1828800"/>
-            <a:ext cx="10545775" cy="1097280"/>
-          </a:xfrm>
-          <a:prstGeom prst="rect">
-            <a:avLst/>
-          </a:prstGeom>
-          <a:noFill/>
-        </p:spPr>
-        <p:txBody>
-          <a:bodyPr wrap="none">
-            <a:spAutoFit/>
-          </a:bodyPr>
-          <a:lstStyle/>
-          <a:p>
-            <a:pPr>
-              <a:defRPr sz="4000" b="1">
-                <a:solidFill>
-                  <a:srgbClr val="FFFFFF"/>
-                </a:solidFill>
-              </a:defRPr>
-            </a:pPr>
+          <p:cNvPr id="2" name="Title 1"/>
+          <p:cNvSpPr>
+            <a:spLocks noGrp="1"/>
+          </p:cNvSpPr>
+          <p:nvPr>
+            <p:ph type="title"/>
+          </p:nvPr>
+        </p:nvSpPr>
+        <p:spPr/>
+        <p:txBody>
+          <a:bodyPr/>
+          <a:lstStyle/>
+          <a:p>
             <a:r>
               <a:t>Honest fallback</a:t>
             </a:r>
@@ -3601,70 +3302,21 @@
       </p:sp>
       <p:sp>
         <p:nvSpPr>
-          <p:cNvPr id="4" name="TextBox 3"/>
-          <p:cNvSpPr txBox="1"/>
-          <p:nvPr/>
-        </p:nvSpPr>
-        <p:spPr>
-          <a:xfrm>
-            <a:off x="822960" y="3108960"/>
-            <a:ext cx="10545775" cy="1005840"/>
-          </a:xfrm>
-          <a:prstGeom prst="rect">
-            <a:avLst/>
-          </a:prstGeom>
-          <a:noFill/>
-        </p:spPr>
-        <p:txBody>
-          <a:bodyPr wrap="none">
-            <a:spAutoFit/>
-          </a:bodyPr>
-          <a:lstStyle/>
-          <a:p>
-            <a:pPr>
-              <a:defRPr sz="2000">
-                <a:solidFill>
-                  <a:srgbClr val="E8E8E8"/>
-                </a:solidFill>
-              </a:defRPr>
-            </a:pPr>
+          <p:cNvPr id="3" name="Content Placeholder 2"/>
+          <p:cNvSpPr>
+            <a:spLocks noGrp="1"/>
+          </p:cNvSpPr>
+          <p:nvPr>
+            <p:ph idx="1"/>
+          </p:nvPr>
+        </p:nvSpPr>
+        <p:spPr/>
+        <p:txBody>
+          <a:bodyPr/>
+          <a:lstStyle/>
+          <a:p>
             <a:r>
               <a:t>A corrupt file gets a sentence and a save-a-copy action.</a:t>
-            </a:r>
-          </a:p>
-        </p:txBody>
-      </p:sp>
-      <p:sp>
-        <p:nvSpPr>
-          <p:cNvPr id="5" name="TextBox 4"/>
-          <p:cNvSpPr txBox="1"/>
-          <p:nvPr/>
-        </p:nvSpPr>
-        <p:spPr>
-          <a:xfrm>
-            <a:off x="10789920" y="6035040"/>
-            <a:ext cx="914400" cy="365760"/>
-          </a:xfrm>
-          <a:prstGeom prst="rect">
-            <a:avLst/>
-          </a:prstGeom>
-          <a:noFill/>
-        </p:spPr>
-        <p:txBody>
-          <a:bodyPr wrap="none">
-            <a:spAutoFit/>
-          </a:bodyPr>
-          <a:lstStyle/>
-          <a:p>
-            <a:pPr>
-              <a:defRPr sz="1200">
-                <a:solidFill>
-                  <a:srgbClr val="CCCCCC"/>
-                </a:solidFill>
-              </a:defRPr>
-            </a:pPr>
-            <a:r>
-              <a:t>4 / 4</a:t>
             </a:r>
           </a:p>
         </p:txBody>
